--- a/word-drafts/figures/Observability-Fig1-Landscape.pptx
+++ b/word-drafts/figures/Observability-Fig1-Landscape.pptx
@@ -7,7 +7,7 @@
   <p:sldIdLst>
     <p:sldId id="256" r:id="rId7"/>
   </p:sldIdLst>
-  <p:sldSz cx="7829550" cy="4514850" type="screen4x3"/>
+  <p:sldSz cx="8172450" cy="4686300" type="screen4x3"/>
   <p:notesSz cx="6858000" cy="9144000"/>
   <p:defaultTextStyle>
     <a:defPPr>
@@ -3096,7 +3096,7 @@
         </p:nvSpPr>
         <p:spPr>
           <a:xfrm>
-            <a:off x="76200" y="76200"/>
+            <a:off x="247650" y="247650"/>
             <a:ext cx="7677150" cy="1104900"/>
           </a:xfrm>
           <a:prstGeom prst="roundRect">
@@ -3149,7 +3149,7 @@
         </p:nvSpPr>
         <p:spPr>
           <a:xfrm>
-            <a:off x="247650" y="476250"/>
+            <a:off x="419100" y="647700"/>
             <a:ext cx="2190750" cy="533400"/>
           </a:xfrm>
           <a:prstGeom prst="rect">
@@ -3202,7 +3202,7 @@
         </p:nvSpPr>
         <p:spPr>
           <a:xfrm>
-            <a:off x="2819400" y="476250"/>
+            <a:off x="2990850" y="647700"/>
             <a:ext cx="2190750" cy="533400"/>
           </a:xfrm>
           <a:prstGeom prst="rect">
@@ -3255,7 +3255,7 @@
         </p:nvSpPr>
         <p:spPr>
           <a:xfrm>
-            <a:off x="5391150" y="476250"/>
+            <a:off x="5562600" y="647700"/>
             <a:ext cx="2190750" cy="533400"/>
           </a:xfrm>
           <a:prstGeom prst="rect">
@@ -3308,7 +3308,7 @@
         </p:nvSpPr>
         <p:spPr>
           <a:xfrm>
-            <a:off x="2819400" y="1562100"/>
+            <a:off x="2990850" y="1733550"/>
             <a:ext cx="2190750" cy="533400"/>
           </a:xfrm>
           <a:prstGeom prst="rect">
@@ -3383,7 +3383,7 @@
         </p:nvSpPr>
         <p:spPr>
           <a:xfrm>
-            <a:off x="2819400" y="2647950"/>
+            <a:off x="2990850" y="2819400"/>
             <a:ext cx="2190750" cy="533400"/>
           </a:xfrm>
           <a:prstGeom prst="rect">
@@ -3436,7 +3436,7 @@
         </p:nvSpPr>
         <p:spPr>
           <a:xfrm>
-            <a:off x="247650" y="3733800"/>
+            <a:off x="419100" y="3905250"/>
             <a:ext cx="2190750" cy="533400"/>
           </a:xfrm>
           <a:prstGeom prst="rect">
@@ -3500,7 +3500,7 @@
         </p:nvSpPr>
         <p:spPr>
           <a:xfrm>
-            <a:off x="2819400" y="3733800"/>
+            <a:off x="2990850" y="3905250"/>
             <a:ext cx="2190750" cy="533400"/>
           </a:xfrm>
           <a:prstGeom prst="rect">
@@ -3564,7 +3564,7 @@
         </p:nvSpPr>
         <p:spPr>
           <a:xfrm>
-            <a:off x="5391150" y="3733800"/>
+            <a:off x="5562600" y="3905250"/>
             <a:ext cx="2190750" cy="533400"/>
           </a:xfrm>
           <a:prstGeom prst="rect">
@@ -3631,7 +3631,7 @@
         </p:nvCxnSpPr>
         <p:spPr>
           <a:xfrm>
-            <a:off x="1343025" y="1009650"/>
+            <a:off x="1514475" y="1181100"/>
             <a:ext cx="2571750" cy="552450"/>
           </a:xfrm>
           <a:prstGeom prst="line">
@@ -3669,7 +3669,7 @@
         </p:nvCxnSpPr>
         <p:spPr>
           <a:xfrm>
-            <a:off x="3914775" y="1009650"/>
+            <a:off x="4086225" y="1181100"/>
             <a:ext cx="0" cy="552450"/>
           </a:xfrm>
           <a:prstGeom prst="line">
@@ -3707,7 +3707,7 @@
         </p:nvCxnSpPr>
         <p:spPr>
           <a:xfrm flipH="1">
-            <a:off x="3914775" y="1009650"/>
+            <a:off x="4086225" y="1181100"/>
             <a:ext cx="2571750" cy="552450"/>
           </a:xfrm>
           <a:prstGeom prst="line">
@@ -3745,7 +3745,7 @@
         </p:nvCxnSpPr>
         <p:spPr>
           <a:xfrm>
-            <a:off x="3914775" y="2095500"/>
+            <a:off x="4086225" y="2266950"/>
             <a:ext cx="0" cy="552450"/>
           </a:xfrm>
           <a:prstGeom prst="line">
@@ -3772,9 +3772,42 @@
           </a:fontRef>
         </p:style>
       </p:cxnSp>
+      <p:sp>
+        <p:nvSpPr>
+          <p:cNvPr id="15" name="TextBox 14"/>
+          <p:cNvSpPr txBox="1"/>
+          <p:nvPr/>
+        </p:nvSpPr>
+        <p:spPr>
+          <a:xfrm>
+            <a:off x="4124325" y="2486025"/>
+            <a:ext cx="523875" cy="123825"/>
+          </a:xfrm>
+          <a:prstGeom prst="rect">
+            <a:avLst/>
+          </a:prstGeom>
+          <a:noFill/>
+        </p:spPr>
+        <p:txBody>
+          <a:bodyPr wrap="none" lIns="0" rIns="0" tIns="0" bIns="0">
+            <a:spAutoFit/>
+          </a:bodyPr>
+          <a:lstStyle/>
+          <a:p>
+            <a:r>
+              <a:rPr sz="800">
+                <a:solidFill>
+                  <a:srgbClr val="444444"/>
+                </a:solidFill>
+              </a:rPr>
+              <a:t>OTLP metrics</a:t>
+            </a:r>
+          </a:p>
+        </p:txBody>
+      </p:sp>
       <p:cxnSp>
         <p:nvCxnSpPr>
-          <p:cNvPr id="15" name="Connector 14"/>
+          <p:cNvPr id="16" name="Connector 15"/>
           <p:cNvCxnSpPr>
             <a:stCxn id="7" idx="2"/>
             <a:endCxn id="8" idx="0"/>
@@ -3783,7 +3816,7 @@
         </p:nvCxnSpPr>
         <p:spPr>
           <a:xfrm flipH="1">
-            <a:off x="1343025" y="3181350"/>
+            <a:off x="1514475" y="3352800"/>
             <a:ext cx="2571750" cy="552450"/>
           </a:xfrm>
           <a:prstGeom prst="line">
@@ -3812,7 +3845,7 @@
       </p:cxnSp>
       <p:cxnSp>
         <p:nvCxnSpPr>
-          <p:cNvPr id="16" name="Connector 15"/>
+          <p:cNvPr id="17" name="Connector 16"/>
           <p:cNvCxnSpPr>
             <a:stCxn id="6" idx="2"/>
             <a:endCxn id="7" idx="0"/>
@@ -3821,7 +3854,7 @@
         </p:nvCxnSpPr>
         <p:spPr>
           <a:xfrm>
-            <a:off x="3914775" y="2095500"/>
+            <a:off x="4086225" y="2266950"/>
             <a:ext cx="0" cy="552450"/>
           </a:xfrm>
           <a:prstGeom prst="line">
@@ -3848,9 +3881,42 @@
           </a:fontRef>
         </p:style>
       </p:cxnSp>
+      <p:sp>
+        <p:nvSpPr>
+          <p:cNvPr id="18" name="TextBox 17"/>
+          <p:cNvSpPr txBox="1"/>
+          <p:nvPr/>
+        </p:nvSpPr>
+        <p:spPr>
+          <a:xfrm>
+            <a:off x="4124325" y="2628900"/>
+            <a:ext cx="419100" cy="123825"/>
+          </a:xfrm>
+          <a:prstGeom prst="rect">
+            <a:avLst/>
+          </a:prstGeom>
+          <a:noFill/>
+        </p:spPr>
+        <p:txBody>
+          <a:bodyPr wrap="none" lIns="0" rIns="0" tIns="0" bIns="0">
+            <a:spAutoFit/>
+          </a:bodyPr>
+          <a:lstStyle/>
+          <a:p>
+            <a:r>
+              <a:rPr sz="800">
+                <a:solidFill>
+                  <a:srgbClr val="444444"/>
+                </a:solidFill>
+              </a:rPr>
+              <a:t>OTLP logs</a:t>
+            </a:r>
+          </a:p>
+        </p:txBody>
+      </p:sp>
       <p:cxnSp>
         <p:nvCxnSpPr>
-          <p:cNvPr id="17" name="Connector 16"/>
+          <p:cNvPr id="19" name="Connector 18"/>
           <p:cNvCxnSpPr>
             <a:stCxn id="7" idx="2"/>
             <a:endCxn id="9" idx="0"/>
@@ -3859,7 +3925,7 @@
         </p:nvCxnSpPr>
         <p:spPr>
           <a:xfrm>
-            <a:off x="3914775" y="3181350"/>
+            <a:off x="4086225" y="3352800"/>
             <a:ext cx="0" cy="552450"/>
           </a:xfrm>
           <a:prstGeom prst="line">
@@ -3888,7 +3954,7 @@
       </p:cxnSp>
       <p:cxnSp>
         <p:nvCxnSpPr>
-          <p:cNvPr id="18" name="Connector 17"/>
+          <p:cNvPr id="20" name="Connector 19"/>
           <p:cNvCxnSpPr>
             <a:stCxn id="6" idx="2"/>
             <a:endCxn id="7" idx="0"/>
@@ -3897,7 +3963,7 @@
         </p:nvCxnSpPr>
         <p:spPr>
           <a:xfrm>
-            <a:off x="3914775" y="2095500"/>
+            <a:off x="4086225" y="2266950"/>
             <a:ext cx="0" cy="552450"/>
           </a:xfrm>
           <a:prstGeom prst="line">
@@ -3924,9 +3990,42 @@
           </a:fontRef>
         </p:style>
       </p:cxnSp>
+      <p:sp>
+        <p:nvSpPr>
+          <p:cNvPr id="21" name="TextBox 20"/>
+          <p:cNvSpPr txBox="1"/>
+          <p:nvPr/>
+        </p:nvSpPr>
+        <p:spPr>
+          <a:xfrm>
+            <a:off x="4124325" y="3486150"/>
+            <a:ext cx="476250" cy="123825"/>
+          </a:xfrm>
+          <a:prstGeom prst="rect">
+            <a:avLst/>
+          </a:prstGeom>
+          <a:noFill/>
+        </p:spPr>
+        <p:txBody>
+          <a:bodyPr wrap="none" lIns="0" rIns="0" tIns="0" bIns="0">
+            <a:spAutoFit/>
+          </a:bodyPr>
+          <a:lstStyle/>
+          <a:p>
+            <a:r>
+              <a:rPr sz="800">
+                <a:solidFill>
+                  <a:srgbClr val="444444"/>
+                </a:solidFill>
+              </a:rPr>
+              <a:t>OTLP traces</a:t>
+            </a:r>
+          </a:p>
+        </p:txBody>
+      </p:sp>
       <p:cxnSp>
         <p:nvCxnSpPr>
-          <p:cNvPr id="19" name="Connector 18"/>
+          <p:cNvPr id="22" name="Connector 21"/>
           <p:cNvCxnSpPr>
             <a:stCxn id="7" idx="2"/>
             <a:endCxn id="10" idx="0"/>
@@ -3935,7 +4034,7 @@
         </p:nvCxnSpPr>
         <p:spPr>
           <a:xfrm>
-            <a:off x="3914775" y="3181350"/>
+            <a:off x="4086225" y="3352800"/>
             <a:ext cx="2571750" cy="552450"/>
           </a:xfrm>
           <a:prstGeom prst="line">

--- a/word-drafts/figures/Observability-Fig1-Landscape.pptx
+++ b/word-drafts/figures/Observability-Fig1-Landscape.pptx
@@ -3781,7 +3781,7 @@
         <p:spPr>
           <a:xfrm>
             <a:off x="4124325" y="2486025"/>
-            <a:ext cx="523875" cy="123825"/>
+            <a:ext cx="657225" cy="123825"/>
           </a:xfrm>
           <a:prstGeom prst="rect">
             <a:avLst/>
@@ -3890,7 +3890,7 @@
         <p:spPr>
           <a:xfrm>
             <a:off x="4124325" y="2628900"/>
-            <a:ext cx="419100" cy="123825"/>
+            <a:ext cx="504825" cy="123825"/>
           </a:xfrm>
           <a:prstGeom prst="rect">
             <a:avLst/>
@@ -3999,7 +3999,7 @@
         <p:spPr>
           <a:xfrm>
             <a:off x="4124325" y="3486150"/>
-            <a:ext cx="476250" cy="123825"/>
+            <a:ext cx="590550" cy="123825"/>
           </a:xfrm>
           <a:prstGeom prst="rect">
             <a:avLst/>
